--- a/docs/aisleflow-mapf-presentation.pptx
+++ b/docs/aisleflow-mapf-presentation.pptx
@@ -713,7 +713,7 @@
               <c:strCache>
                 <c:ptCount val="1"/>
                 <c:pt idx="0">
-                  <c:v>base (lifelong_pibt)</c:v>
+                  <c:v>base (hysteresis_pibt)</c:v>
                 </c:pt>
               </c:strCache>
             </c:strRef>
@@ -775,13 +775,13 @@
                 <c:formatCode>General</c:formatCode>
                 <c:ptCount val="3"/>
                 <c:pt idx="0">
-                  <c:v>0.13</c:v>
+                  <c:v>0.149</c:v>
                 </c:pt>
                 <c:pt idx="1">
-                  <c:v>0.147</c:v>
+                  <c:v>0.148</c:v>
                 </c:pt>
                 <c:pt idx="2">
-                  <c:v>0.505</c:v>
+                  <c:v>0.337</c:v>
                 </c:pt>
               </c:numCache>
             </c:numRef>
@@ -796,7 +796,7 @@
               <c:strCache>
                 <c:ptCount val="1"/>
                 <c:pt idx="0">
-                  <c:v>direction alone</c:v>
+                  <c:v>aisle direction alone</c:v>
                 </c:pt>
               </c:strCache>
             </c:strRef>
@@ -858,13 +858,13 @@
                 <c:formatCode>General</c:formatCode>
                 <c:ptCount val="3"/>
                 <c:pt idx="0">
-                  <c:v>0.144</c:v>
+                  <c:v>0.149</c:v>
                 </c:pt>
                 <c:pt idx="1">
-                  <c:v>0.165</c:v>
+                  <c:v>0.158</c:v>
                 </c:pt>
                 <c:pt idx="2">
-                  <c:v>0.357</c:v>
+                  <c:v>0.405</c:v>
                 </c:pt>
               </c:numCache>
             </c:numRef>
@@ -879,7 +879,7 @@
               <c:strCache>
                 <c:ptCount val="1"/>
                 <c:pt idx="0">
-                  <c:v>turning cost alone</c:v>
+                  <c:v>entry admission alone</c:v>
                 </c:pt>
               </c:strCache>
             </c:strRef>
@@ -941,13 +941,13 @@
                 <c:formatCode>General</c:formatCode>
                 <c:ptCount val="3"/>
                 <c:pt idx="0">
-                  <c:v>0.157</c:v>
+                  <c:v>0.149</c:v>
                 </c:pt>
                 <c:pt idx="1">
-                  <c:v>0.201</c:v>
+                  <c:v>0.125</c:v>
                 </c:pt>
                 <c:pt idx="2">
-                  <c:v>0.391</c:v>
+                  <c:v>0.262</c:v>
                 </c:pt>
               </c:numCache>
             </c:numRef>
@@ -962,7 +962,7 @@
               <c:strCache>
                 <c:ptCount val="1"/>
                 <c:pt idx="0">
-                  <c:v>both (directional_pibt)</c:v>
+                  <c:v>both (aisle_managed_pibt)</c:v>
                 </c:pt>
               </c:strCache>
             </c:strRef>
@@ -1024,13 +1024,13 @@
                 <c:formatCode>General</c:formatCode>
                 <c:ptCount val="3"/>
                 <c:pt idx="0">
-                  <c:v>0.144</c:v>
+                  <c:v>0.149</c:v>
                 </c:pt>
                 <c:pt idx="1">
-                  <c:v>0.159</c:v>
+                  <c:v>0.095</c:v>
                 </c:pt>
                 <c:pt idx="2">
-                  <c:v>0.269</c:v>
+                  <c:v>0.217</c:v>
                 </c:pt>
               </c:numCache>
             </c:numRef>
@@ -5464,7 +5464,7 @@
                 <a:ea typeface="Cambria" pitchFamily="34" charset="-122"/>
                 <a:cs typeface="Cambria" pitchFamily="34" charset="-120"/>
               </a:rPr>
-              <a:t>161</a:t>
+              <a:t>179</a:t>
             </a:r>
             <a:endParaRPr lang="en-US" sz="4200" dirty="0"/>
           </a:p>
@@ -6506,7 +6506,7 @@
                 <a:ea typeface="Calibri" pitchFamily="34" charset="-122"/>
                 <a:cs typeface="Calibri" pitchFamily="34" charset="-120"/>
               </a:rPr>
-              <a:t>constrains and ranks candidates — never decides safety</a:t>
+              <a:t>ranks candidates and prices the ones it dislikes — never removes them</a:t>
             </a:r>
             <a:endParaRPr lang="en-US" sz="1200" dirty="0"/>
           </a:p>
@@ -7014,7 +7014,7 @@
                 <a:ea typeface="Calibri" pitchFamily="34" charset="-122"/>
                 <a:cs typeface="Calibri" pitchFamily="34" charset="-120"/>
               </a:rPr>
-              <a:t>The invariant: no high-level formula can produce a collision, by construction. Zero vertex conflicts and zero swap conflicts were observed across every map, density, seed and variant tested — checked every timestep by validate_plan.</a:t>
+              <a:t>The invariant: no high-level formula can produce a collision, and none can remove a legal move either. Zero vertex and zero swap conflicts across every map, density, seed and variant tested — checked every timestep by validate_plan.</a:t>
             </a:r>
             <a:endParaRPr lang="en-US" sz="1300" dirty="0"/>
           </a:p>
@@ -7235,7 +7235,7 @@
                 <a:ea typeface="Courier New" pitchFamily="34" charset="-122"/>
                 <a:cs typeface="Courier New" pitchFamily="34" charset="-120"/>
               </a:rPr>
-              <a:t>            − λ·turn  −  μ·congestion  −  ν·wait  −  ξ·[bottleneck cell]</a:t>
+              <a:t>      − λ·turn  −  μ·congestion  −  ν·wait  −  ξ·[bottleneck]  −  ζ·[counterflow]</a:t>
             </a:r>
             <a:endParaRPr lang="en-US" sz="1600" dirty="0"/>
           </a:p>
@@ -7529,7 +7529,7 @@
                 <a:ea typeface="Calibri" pitchFamily="34" charset="-122"/>
                 <a:cs typeface="Calibri" pitchFamily="34" charset="-120"/>
               </a:rPr>
-              <a:t>Reward for moving the way the robot prefers — decayed smoothly as it nears its waypoint, so preference yields to arrival.</a:t>
+              <a:t>Reward for moving the way the robot prefers. Its proximity decay turns out to be inert — β only breaks ties among candidates with equal progress, and the decay lowers it exactly where progress already decides.</a:t>
             </a:r>
             <a:endParaRPr lang="en-US" sz="1150" dirty="0"/>
           </a:p>
@@ -7823,7 +7823,7 @@
                 <a:ea typeface="Calibri" pitchFamily="34" charset="-122"/>
                 <a:cs typeface="Calibri" pitchFamily="34" charset="-120"/>
               </a:rPr>
-              <a:t>A flat penalty per direction change. The cheapest term here, and — spoiler — the one that did the most work.</a:t>
+              <a:t>A flat penalty per direction change. The cheapest term here, and the best single mechanism in the system: turning_cost_only is the top variant on warehouse_corridors.</a:t>
             </a:r>
             <a:endParaRPr lang="en-US" sz="1150" dirty="0"/>
           </a:p>
@@ -7970,7 +7970,7 @@
                 <a:ea typeface="Calibri" pitchFamily="34" charset="-122"/>
                 <a:cs typeface="Calibri" pitchFamily="34" charset="-120"/>
               </a:rPr>
-              <a:t>Local density, aisle occupancy and downstream lookahead, mixed into one term.</a:t>
+              <a:t>Local density, aisle occupancy and downstream lookahead, mixed into one term — now all three normalised to [0,1], so μ·C cannot outrank a step of progress.</a:t>
             </a:r>
             <a:endParaRPr lang="en-US" sz="1150" dirty="0"/>
           </a:p>
@@ -8156,7 +8156,7 @@
                 <a:ea typeface="Calibri" pitchFamily="34" charset="-122"/>
                 <a:cs typeface="Calibri" pitchFamily="34" charset="-120"/>
               </a:rPr>
-              <a:t>Intended ordering α &gt; β_strong &gt; λ (10 &gt; 3 &gt; 0.5). The spec's route-normalised progress silently inverts it at long range, so this implementation defaults to step-normalised progress, with Δ taking the values −1, 0 or +1.</a:t>
+              <a:t>The seventh term, ζ = 8.0, is where the aisle layer acts: the price of driving against a committed direction. Intended ordering α &gt; ζ &gt; β &gt; γ &gt; λ  (10 &gt; 8 &gt; 3 &gt; 2 &gt; 0.5). Two things had to change for that to hold at runtime — the aisle rules became penalties instead of rejections, and the congestion mixture was normalised, having been a robot count that reached μ·C = 9.6 against α·Δ = 10.</a:t>
             </a:r>
             <a:endParaRPr lang="en-US" sz="1000" dirty="0"/>
           </a:p>
@@ -8266,7 +8266,7 @@
                 <a:ea typeface="Cambria" pitchFamily="34" charset="-122"/>
                 <a:cs typeface="Cambria" pitchFamily="34" charset="-120"/>
               </a:rPr>
-              <a:t>Aisles decide, with hysteresis and a drain phase</a:t>
+              <a:t>Aisles decide, with a minimum green and a maximum green</a:t>
             </a:r>
             <a:endParaRPr lang="en-US" sz="3400" dirty="0"/>
           </a:p>
@@ -8616,7 +8616,7 @@
                 <a:ea typeface="Calibri" pitchFamily="34" charset="-122"/>
                 <a:cs typeface="Calibri" pitchFamily="34" charset="-120"/>
               </a:rPr>
-              <a:t>opposing demand exceeds τ</a:t>
+              <a:t>opposing demand exceeds τ, or T_max expires</a:t>
             </a:r>
             <a:endParaRPr lang="en-US" sz="1150" dirty="0"/>
           </a:p>
@@ -8728,7 +8728,7 @@
                 <a:ea typeface="Calibri" pitchFamily="34" charset="-122"/>
                 <a:cs typeface="Calibri" pitchFamily="34" charset="-120"/>
               </a:rPr>
-              <a:t>occupancy reaches zero — or the</a:t>
+              <a:t>occupancy reaches zero — the aisle then</a:t>
             </a:r>
             <a:endParaRPr lang="en-US" sz="1150" dirty="0"/>
           </a:p>
@@ -8748,7 +8748,7 @@
                 <a:ea typeface="Calibri" pitchFamily="34" charset="-122"/>
                 <a:cs typeface="Calibri" pitchFamily="34" charset="-120"/>
               </a:rPr>
-              <a:t>drain timeout fires — and it reopens</a:t>
+              <a:t>commits the direction that asked for the drain</a:t>
             </a:r>
             <a:endParaRPr lang="en-US" sz="1150" dirty="0"/>
           </a:p>
@@ -8863,7 +8863,7 @@
                 <a:ea typeface="Cambria" pitchFamily="34" charset="-122"/>
                 <a:cs typeface="Cambria" pitchFamily="34" charset="-120"/>
               </a:rPr>
-              <a:t>Hysteresis, not reflexes</a:t>
+              <a:t>Two clocks, not one</a:t>
             </a:r>
             <a:endParaRPr lang="en-US" sz="1800" dirty="0"/>
           </a:p>
@@ -8909,7 +8909,7 @@
                 <a:ea typeface="Calibri" pitchFamily="34" charset="-122"/>
                 <a:cs typeface="Calibri" pitchFamily="34" charset="-120"/>
               </a:rPr>
-              <a:t>Each robot contributes weighted demand for FORWARD or REVERSE in the aisles along its route.</a:t>
+              <a:t>Each robot contributes weighted demand for FORWARD or REVERSE in the aisle it is about to enter.</a:t>
             </a:r>
             <a:endParaRPr lang="en-US" sz="1200" dirty="0"/>
           </a:p>
@@ -8933,7 +8933,7 @@
                 <a:ea typeface="Calibri" pitchFamily="34" charset="-122"/>
                 <a:cs typeface="Calibri" pitchFamily="34" charset="-120"/>
               </a:rPr>
-              <a:t>A direction flips only once the imbalance leaves a dead band of ±τ (default 5.0).</a:t>
+              <a:t>Minimum green: a direction is locked for T_min steps and only flips once the imbalance leaves a dead band of ±τ, so it cannot flap.</a:t>
             </a:r>
             <a:endParaRPr lang="en-US" sz="1200" dirty="0"/>
           </a:p>
@@ -8957,7 +8957,7 @@
                 <a:ea typeface="Calibri" pitchFamily="34" charset="-122"/>
                 <a:cs typeface="Calibri" pitchFamily="34" charset="-120"/>
               </a:rPr>
-              <a:t>A committed direction is locked for T_min steps, so it cannot flap.</a:t>
+              <a:t>Maximum green: past T_max, any opposing demand at all forces a drain and a flip. Without it a balanced aisle — the normal case with pickups one side and deliveries the other — starves half its traffic forever.</a:t>
             </a:r>
             <a:endParaRPr lang="en-US" sz="1200" dirty="0"/>
           </a:p>
@@ -9076,7 +9076,7 @@
                 <a:ea typeface="Calibri" pitchFamily="34" charset="-122"/>
                 <a:cs typeface="Calibri" pitchFamily="34" charset="-120"/>
               </a:rPr>
-              <a:t>A robot at an entrance gets a ticket only if occupancy plus pending tickets stay under capacity.</a:t>
+              <a:t>A robot at an entrance gets a ticket only if occupancy plus pending tickets stay under capacity. Capacity now applies to open aisles too; the ticket only to directional ones.</a:t>
             </a:r>
             <a:endParaRPr lang="en-US" sz="1200" dirty="0"/>
           </a:p>
@@ -9124,7 +9124,7 @@
                 <a:ea typeface="Calibri" pitchFamily="34" charset="-122"/>
                 <a:cs typeface="Calibri" pitchFamily="34" charset="-120"/>
               </a:rPr>
-              <a:t>Direction restricts entry, not interior movement — a robot inside may always leave.</a:t>
+              <a:t>Direction restricts entry, not interior movement — and it is priced, not enforced, so a robot can always buy its way out.</a:t>
             </a:r>
             <a:endParaRPr lang="en-US" sz="1200" dirty="0"/>
           </a:p>
@@ -9234,7 +9234,7 @@
                 <a:ea typeface="Cambria" pitchFamily="34" charset="-122"/>
                 <a:cs typeface="Cambria" pitchFamily="34" charset="-120"/>
               </a:rPr>
-              <a:t>Seven levels of recovery, one per timestep</a:t>
+              <a:t>Seven levels of recovery, on a corroborated signal</a:t>
             </a:r>
             <a:endParaRPr lang="en-US" sz="3400" dirty="0"/>
           </a:p>
@@ -9276,7 +9276,7 @@
                 <a:ea typeface="Calibri" pitchFamily="34" charset="-122"/>
                 <a:cs typeface="Calibri" pitchFamily="34" charset="-120"/>
               </a:rPr>
-              <a:t>One-way constraints break PIBT's own progress argument: inheritance works because you can always push a robot into an adjacent cell, and a directional aisle removes exactly that freedom. Recovery is what makes the aisle layer survivable.</a:t>
+              <a:t>Recovery exists for the stalls the one-step planner cannot resolve on its own. What it must not do is fire on ordinary queueing — in dense lifelong traffic a robot waits t_blocked steps as a matter of course, and levels 5-7 are destructive when nothing is actually stuck.</a:t>
             </a:r>
             <a:endParaRPr lang="en-US" sz="1400" dirty="0"/>
           </a:p>
@@ -10293,7 +10293,7 @@
                 <a:ea typeface="Calibri" pitchFamily="34" charset="-122"/>
                 <a:cs typeface="Calibri" pitchFamily="34" charset="-120"/>
               </a:rPr>
-              <a:t>Three independent stall signals: no progress toward the waypoint, a repeated joint configuration, and a cycle in the wait-for dependency graph.</a:t>
+              <a:t>No progress is only a precondition. A group escalates only when a cycle in the wait-for graph or a repeated joint configuration corroborates it — worth 0.134 against 0.022 tasks/step on warehouse_corridors.</a:t>
             </a:r>
             <a:endParaRPr lang="en-US" sz="1150" dirty="0"/>
           </a:p>
@@ -10364,7 +10364,7 @@
                 <a:ea typeface="Calibri" pitchFamily="34" charset="-122"/>
                 <a:cs typeface="Calibri" pitchFamily="34" charset="-120"/>
               </a:rPr>
-              <a:t>THE PROBLEM WE ACTUALLY SOLVED THIS PASS</a:t>
+              <a:t>WHAT WE FOUND WHEN WE CHECKED</a:t>
             </a:r>
             <a:endParaRPr lang="en-US" sz="1150" dirty="0"/>
           </a:p>
@@ -10403,7 +10403,7 @@
                 <a:ea typeface="Cambria" pitchFamily="34" charset="-122"/>
                 <a:cs typeface="Cambria" pitchFamily="34" charset="-120"/>
               </a:rPr>
-              <a:t>The algorithm was fine. The evaluation was not.</a:t>
+              <a:t>The evaluation was not the only thing that was wrong.</a:t>
             </a:r>
             <a:endParaRPr lang="en-US" sz="3400" dirty="0"/>
           </a:p>
@@ -10535,7 +10535,7 @@
                 <a:ea typeface="Cambria" pitchFamily="34" charset="-122"/>
                 <a:cs typeface="Cambria" pitchFamily="34" charset="-120"/>
               </a:rPr>
-              <a:t>De-confounded the ablation</a:t>
+              <a:t>The aisle layer broke our own invariant</a:t>
             </a:r>
             <a:endParaRPr lang="en-US" sz="1750" dirty="0"/>
           </a:p>
@@ -10577,7 +10577,7 @@
                 <a:ea typeface="Calibri" pitchFamily="34" charset="-122"/>
                 <a:cs typeface="Calibri" pitchFamily="34" charset="-120"/>
               </a:rPr>
-              <a:t>Three of the six ladder rungs flipped two flags at once, so no throughput delta could be attributed to either. Added six single-flag variants and three 2×2 factorial designs that split each step into a main effect per flag plus an interaction.</a:t>
+              <a:t>Aisle direction and reservations were applied as hard rejections, deleting legal moves before scoring — while slide 2 says the high level never replaces PIBT's backtracking. Inheritance works because a robot can always be pushed aside. Pricing direction instead: 1.9× to 3.5× throughput, significant on all four maps.</a:t>
             </a:r>
             <a:endParaRPr lang="en-US" sz="1200" dirty="0"/>
           </a:p>
@@ -10709,7 +10709,7 @@
                 <a:ea typeface="Cambria" pitchFamily="34" charset="-122"/>
                 <a:cs typeface="Cambria" pitchFamily="34" charset="-120"/>
               </a:rPr>
-              <a:t>Added external baselines</a:t>
+              <a:t>Two hypotheses were never tested</a:t>
             </a:r>
             <a:endParaRPr lang="en-US" sz="1750" dirty="0"/>
           </a:p>
@@ -10751,7 +10751,7 @@
                 <a:ea typeface="Calibri" pitchFamily="34" charset="-122"/>
                 <a:cs typeface="Calibri" pitchFamily="34" charset="-120"/>
               </a:rPr>
-              <a:t>Every prior comparison was this codebase against itself. Implemented Token Passing (2017) and RHCR (2021) from scratch on a shared space-time A* with a reservation table, behind a planner_factory seam.</a:t>
+              <a:t>reservations was a no-op unless direction_control was “aisle”, and the variant built to isolate it sets “robot” — so H3's treatment cell was a bit-identical copy of its control. On warehouse_bottleneck no aisle ever commits a direction at all, so H1's headline map produced no treatment either.</a:t>
             </a:r>
             <a:endParaRPr lang="en-US" sz="1200" dirty="0"/>
           </a:p>
@@ -10883,7 +10883,7 @@
                 <a:ea typeface="Cambria" pitchFamily="34" charset="-122"/>
                 <a:cs typeface="Cambria" pitchFamily="34" charset="-120"/>
               </a:rPr>
-              <a:t>Made the numbers defensible</a:t>
+              <a:t>The aisle signal could starve</a:t>
             </a:r>
             <a:endParaRPr lang="en-US" sz="1750" dirty="0"/>
           </a:p>
@@ -10925,7 +10925,7 @@
                 <a:ea typeface="Calibri" pitchFamily="34" charset="-122"/>
                 <a:cs typeface="Calibri" pitchFamily="34" charset="-120"/>
               </a:rPr>
-              <a:t>A pure-Python stats module — bootstrap confidence intervals and a 10,000-permutation two-sided test — so results are reported with significance rather than as means over three seeds.</a:t>
+              <a:t>A committed direction was held indefinitely unless the imbalance crossed τ — and a warehouse with pickups one side and deliveries the other produces balanced demand by construction. Corridors reached an absorbing deadlock: 35 of 35 robots stalled by t=120, identical state at t=199.</a:t>
             </a:r>
             <a:endParaRPr lang="en-US" sz="1200" dirty="0"/>
           </a:p>
@@ -11057,7 +11057,7 @@
                 <a:ea typeface="Cambria" pitchFamily="34" charset="-122"/>
                 <a:cs typeface="Cambria" pitchFamily="34" charset="-120"/>
               </a:rPr>
-              <a:t>Removed the install barrier</a:t>
+              <a:t>Three more, each measured</a:t>
             </a:r>
             <a:endParaRPr lang="en-US" sz="1750" dirty="0"/>
           </a:p>
@@ -11099,7 +11099,7 @@
                 <a:ea typeface="Calibri" pitchFamily="34" charset="-122"/>
                 <a:cs typeface="Calibri" pitchFamily="34" charset="-120"/>
               </a:rPr>
-              <a:t>python3 main.py runs the GUI, the CLI and every experiment with nothing installed. The test suite grew from 102 to 161 tests, covering both baselines on every bundled map.</a:t>
+              <a:t>Aisles were L and U shapes, so a one-way rule blocked corners both ways; recovery fired on healthy traffic; and the congestion term was a robot count mixed with two ratios, so it outranked the terms it modulates. 179 tests, up from 161.</a:t>
             </a:r>
             <a:endParaRPr lang="en-US" sz="1200" dirty="0"/>
           </a:p>
@@ -11172,7 +11172,7 @@
                 <a:ea typeface="Calibri" pitchFamily="34" charset="-122"/>
                 <a:cs typeface="Calibri" pitchFamily="34" charset="-120"/>
               </a:rPr>
-              <a:t>Crucially, task assignment is held identical across all five planners — so the comparison isolates the movement and collision-avoidance layer, and nothing else.</a:t>
+              <a:t>Task assignment is still held identical across all five planners, so the baseline comparison isolates the movement layer and nothing else.</a:t>
             </a:r>
             <a:endParaRPr lang="en-US" sz="1300" dirty="0"/>
           </a:p>
@@ -11781,7 +11781,7 @@
                 <a:ea typeface="Cambria" pitchFamily="34" charset="-122"/>
                 <a:cs typeface="Cambria" pitchFamily="34" charset="-120"/>
               </a:rPr>
-              <a:t>De-confounding overturned two of our own findings</a:t>
+              <a:t>De-confounding, on designs that can now be read</a:t>
             </a:r>
             <a:endParaRPr lang="en-US" sz="3400" dirty="0"/>
           </a:p>
@@ -11870,7 +11870,7 @@
                 <a:ea typeface="Cambria" pitchFamily="34" charset="-122"/>
                 <a:cs typeface="Cambria" pitchFamily="34" charset="-120"/>
               </a:rPr>
-              <a:t>H1 — direction awareness</a:t>
+              <a:t>H3 — the empty cell</a:t>
             </a:r>
             <a:endParaRPr lang="en-US" sz="1700" dirty="0"/>
           </a:p>
@@ -11912,7 +11912,7 @@
                 <a:ea typeface="Calibri" pitchFamily="34" charset="-122"/>
                 <a:cs typeface="Calibri" pitchFamily="34" charset="-120"/>
               </a:rPr>
-              <a:t>On every map, turning cost alone beats direction awareness alone — and on two of three maps it beats the combined variant too. The gain the old ladder credited to aisle direction was mostly an anti-zigzag penalty that has nothing to do with aisles.</a:t>
+              <a:t>reservations_only sets direction_control=“robot”, and the reservation layer was gated on direction_control==“aisle”. Factor B was a bit-identical copy of the base, so its main effect was necessarily zero. “Exactly zero effect” described the wiring, not the mechanism.</a:t>
             </a:r>
             <a:endParaRPr lang="en-US" sz="1200" dirty="0"/>
           </a:p>
@@ -11978,7 +11978,7 @@
                 <a:ea typeface="Calibri" pitchFamily="34" charset="-122"/>
                 <a:cs typeface="Calibri" pitchFamily="34" charset="-120"/>
               </a:rPr>
-              <a:t>H3 — reservations</a:t>
+              <a:t>H1/H3 — the attribution reverses</a:t>
             </a:r>
             <a:endParaRPr lang="en-US" sz="1250" dirty="0"/>
           </a:p>
@@ -12020,7 +12020,7 @@
                 <a:ea typeface="Calibri" pitchFamily="34" charset="-122"/>
                 <a:cs typeface="Calibri" pitchFamily="34" charset="-120"/>
               </a:rPr>
-              <a:t>Reservations alone move throughput by exactly zero on two of three maps. The corridors collapse (0.166 → 0.009) is entirely aisle-level direction control — we had blamed the wrong layer.</a:t>
+              <a:t>With both cells live: on warehouse_medium aisle direction alone raises throughput 0.337 to 0.405, entry admission alone drops it to 0.262, and both together land at 0.217. We had blamed the flag that helps and exonerated the one that costs.</a:t>
             </a:r>
             <a:endParaRPr lang="en-US" sz="1150" dirty="0"/>
           </a:p>
@@ -12086,7 +12086,7 @@
                 <a:ea typeface="Calibri" pitchFamily="34" charset="-122"/>
                 <a:cs typeface="Calibri" pitchFamily="34" charset="-120"/>
               </a:rPr>
-              <a:t>H4 / H6 — recovery</a:t>
+              <a:t>H4 — one flag, three mechanisms</a:t>
             </a:r>
             <a:endParaRPr lang="en-US" sz="1250" dirty="0"/>
           </a:p>
@@ -12128,7 +12128,7 @@
                 <a:ea typeface="Calibri" pitchFamily="34" charset="-122"/>
                 <a:cs typeface="Calibri" pitchFamily="34" charset="-120"/>
               </a:rPr>
-              <a:t>Recovery, not congestion-aware assignment, rescues throughput once aisle control has collapsed it — but it buys those tasks at up to +68% service time.</a:t>
+              <a:t>congestion_aware moved the movement score, the assignment cost and the blocking term together — the same confound the factorials exist to remove, one level down. Split, neither half helps alone.</a:t>
             </a:r>
             <a:endParaRPr lang="en-US" sz="1150" dirty="0"/>
           </a:p>
@@ -12238,7 +12238,7 @@
                 <a:ea typeface="Cambria" pitchFamily="34" charset="-122"/>
                 <a:cs typeface="Cambria" pitchFamily="34" charset="-120"/>
               </a:rPr>
-              <a:t>The honest scoreboard</a:t>
+              <a:t>The scoreboard, on each claim's own metric</a:t>
             </a:r>
             <a:endParaRPr lang="en-US" sz="3400" dirty="0"/>
           </a:p>
@@ -12343,7 +12343,7 @@
                 <a:ea typeface="Calibri" pitchFamily="34" charset="-122"/>
                 <a:cs typeface="Calibri" pitchFamily="34" charset="-120"/>
               </a:rPr>
-              <a:t>Aisle direction improves throughput in narrow aisles</a:t>
+              <a:t>Aisle direction lifts per-aisle flow in narrow aisles</a:t>
             </a:r>
             <a:endParaRPr lang="en-US" sz="1300" dirty="0"/>
           </a:p>
@@ -12366,7 +12366,7 @@
             </a:avLst>
           </a:prstGeom>
           <a:solidFill>
-            <a:srgbClr val="AF3527"/>
+            <a:srgbClr val="4A5A68"/>
           </a:solidFill>
           <a:ln/>
         </p:spPr>
@@ -12404,7 +12404,7 @@
                 <a:ea typeface="Calibri" pitchFamily="34" charset="-122"/>
                 <a:cs typeface="Calibri" pitchFamily="34" charset="-120"/>
               </a:rPr>
-              <a:t>not supported</a:t>
+              <a:t>not on its own metric</a:t>
             </a:r>
             <a:endParaRPr lang="en-US" sz="1100" dirty="0"/>
           </a:p>
@@ -12570,7 +12570,7 @@
                 <a:ea typeface="Calibri" pitchFamily="34" charset="-122"/>
                 <a:cs typeface="Calibri" pitchFamily="34" charset="-120"/>
               </a:rPr>
-              <a:t>supported</a:t>
+              <a:t>supported, every map</a:t>
             </a:r>
             <a:endParaRPr lang="en-US" sz="1100" dirty="0"/>
           </a:p>
@@ -12675,7 +12675,7 @@
                 <a:ea typeface="Calibri" pitchFamily="34" charset="-122"/>
                 <a:cs typeface="Calibri" pitchFamily="34" charset="-120"/>
               </a:rPr>
-              <a:t>Reservations reduce head-on conflicts and deadlocks</a:t>
+              <a:t>Entry capacity admission cuts head-on conflicts</a:t>
             </a:r>
             <a:endParaRPr lang="en-US" sz="1300" dirty="0"/>
           </a:p>
@@ -12698,7 +12698,7 @@
             </a:avLst>
           </a:prstGeom>
           <a:solidFill>
-            <a:srgbClr val="AF3527"/>
+            <a:srgbClr val="4A5A68"/>
           </a:solidFill>
           <a:ln/>
         </p:spPr>
@@ -12736,7 +12736,7 @@
                 <a:ea typeface="Calibri" pitchFamily="34" charset="-122"/>
                 <a:cs typeface="Calibri" pitchFamily="34" charset="-120"/>
               </a:rPr>
-              <a:t>no measurable effect</a:t>
+              <a:t>map-dependent</a:t>
             </a:r>
             <a:endParaRPr lang="en-US" sz="1100" dirty="0"/>
           </a:p>
@@ -12841,7 +12841,7 @@
                 <a:ea typeface="Calibri" pitchFamily="34" charset="-122"/>
                 <a:cs typeface="Calibri" pitchFamily="34" charset="-120"/>
               </a:rPr>
-              <a:t>Congestion-aware assignment cuts service time</a:t>
+              <a:t>Congestion in matching cuts service time</a:t>
             </a:r>
             <a:endParaRPr lang="en-US" sz="1300" dirty="0"/>
           </a:p>
@@ -12902,7 +12902,7 @@
                 <a:ea typeface="Calibri" pitchFamily="34" charset="-122"/>
                 <a:cs typeface="Calibri" pitchFamily="34" charset="-120"/>
               </a:rPr>
-              <a:t>points the other way</a:t>
+              <a:t>not supported</a:t>
             </a:r>
             <a:endParaRPr lang="en-US" sz="1100" dirty="0"/>
           </a:p>
@@ -13007,7 +13007,7 @@
                 <a:ea typeface="Calibri" pitchFamily="34" charset="-122"/>
                 <a:cs typeface="Calibri" pitchFamily="34" charset="-120"/>
               </a:rPr>
-              <a:t>Proximity-dependent direction weights help arrival</a:t>
+              <a:t>Proximity decay of the direction weight helps arrival</a:t>
             </a:r>
             <a:endParaRPr lang="en-US" sz="1300" dirty="0"/>
           </a:p>
@@ -13030,7 +13030,7 @@
             </a:avLst>
           </a:prstGeom>
           <a:solidFill>
-            <a:srgbClr val="1F7A5C"/>
+            <a:srgbClr val="4A5A68"/>
           </a:solidFill>
           <a:ln/>
         </p:spPr>
@@ -13068,7 +13068,7 @@
                 <a:ea typeface="Calibri" pitchFamily="34" charset="-122"/>
                 <a:cs typeface="Calibri" pitchFamily="34" charset="-120"/>
               </a:rPr>
-              <a:t>supported</a:t>
+              <a:t>mechanism is inert</a:t>
             </a:r>
             <a:endParaRPr lang="en-US" sz="1100" dirty="0"/>
           </a:p>
@@ -13234,7 +13234,7 @@
                 <a:ea typeface="Calibri" pitchFamily="34" charset="-122"/>
                 <a:cs typeface="Calibri" pitchFamily="34" charset="-120"/>
               </a:rPr>
-              <a:t>strongly supported</a:t>
+              <a:t>supported on corridors</a:t>
             </a:r>
             <a:endParaRPr lang="en-US" sz="1100" dirty="0"/>
           </a:p>
@@ -13307,7 +13307,7 @@
                 <a:ea typeface="Calibri" pitchFamily="34" charset="-122"/>
                 <a:cs typeface="Calibri" pitchFamily="34" charset="-120"/>
               </a:rPr>
-              <a:t>The aisle layer does not yet beat plain lifelong PIBT on open warehouse graphs. The robot-level pieces — directional preference plus hysteresis — are the part that generalises.</a:t>
+              <a:t>Scored on the quantity each claim names — head-on conflicts for H3, per-aisle flow for H1 — not on global throughput. H1 is the interesting one: it fails on per-aisle flow and yet raises end-to-end throughput on three of four maps, because one-way aisles route each task through fewer aisle transits.</a:t>
             </a:r>
             <a:endParaRPr lang="en-US" sz="1350" dirty="0"/>
           </a:p>
@@ -13378,7 +13378,7 @@
                 <a:ea typeface="Calibri" pitchFamily="34" charset="-122"/>
                 <a:cs typeface="Calibri" pitchFamily="34" charset="-120"/>
               </a:rPr>
-              <a:t>WHY IT FAILS WHERE IT FAILS</a:t>
+              <a:t>WHAT THE FIXES WERE WORTH</a:t>
             </a:r>
             <a:endParaRPr lang="en-US" sz="1150" dirty="0"/>
           </a:p>
@@ -13417,7 +13417,7 @@
                 <a:ea typeface="Cambria" pitchFamily="34" charset="-122"/>
                 <a:cs typeface="Cambria" pitchFamily="34" charset="-120"/>
               </a:rPr>
-              <a:t>Three diagnosed causes, none of them tuning</a:t>
+              <a:t>Three mechanisms, measured one at a time</a:t>
             </a:r>
             <a:endParaRPr lang="en-US" sz="3400" dirty="0"/>
           </a:p>
@@ -13549,7 +13549,7 @@
                 <a:ea typeface="Cambria" pitchFamily="34" charset="-122"/>
                 <a:cs typeface="Cambria" pitchFamily="34" charset="-120"/>
               </a:rPr>
-              <a:t>Capacity is modelled by length, not by exit throughput</a:t>
+              <a:t>Direction ranks candidates instead of rejecting them</a:t>
             </a:r>
             <a:endParaRPr lang="en-US" sz="1700" dirty="0"/>
           </a:p>
@@ -13591,7 +13591,7 @@
                 <a:ea typeface="Calibri" pitchFamily="34" charset="-122"/>
                 <a:cs typeface="Calibri" pitchFamily="34" charset="-120"/>
               </a:rPr>
-              <a:t>A 21-cell corridor gets capacity 10, so ten robots queue single-file behind one exiting robot and the aisle can never drain. An alternative throughput model exists behind a flag; it is too aggressive at the default lock time. The right model is somewhere between the two.</a:t>
+              <a:t>The largest effect in the repository: 0.084 → 0.158 on corridors, 0.112 → 0.304 on narrow, 0.161 → 0.405 on medium, p ≤ 0.016 throughout. A rejected move is a move priority inheritance can no longer use to unblock a chain.</a:t>
             </a:r>
             <a:endParaRPr lang="en-US" sz="1250" dirty="0"/>
           </a:p>
@@ -13723,7 +13723,7 @@
                 <a:ea typeface="Cambria" pitchFamily="34" charset="-122"/>
                 <a:cs typeface="Cambria" pitchFamily="34" charset="-120"/>
               </a:rPr>
-              <a:t>Directional demand is computed per aisle, with no coordination between them</a:t>
+              <a:t>Recovery escalates only on a corroborated stall</a:t>
             </a:r>
             <a:endParaRPr lang="en-US" sz="1700" dirty="0"/>
           </a:p>
@@ -13765,7 +13765,7 @@
                 <a:ea typeface="Calibri" pitchFamily="34" charset="-122"/>
                 <a:cs typeface="Calibri" pitchFamily="34" charset="-120"/>
               </a:rPr>
-              <a:t>All five corridors in warehouse_corridors lock the same way at the same time, leaving return traffic nowhere to go. A static parity bias does not fix it — it fights the demand signal instead of replacing it.</a:t>
+              <a:t>0.022 → 0.134 tasks/step on warehouse_corridors. This was invisible before, because the hard constraints above manufactured real deadlocks for recovery to rescue — remove the cause and the false positives show through.</a:t>
             </a:r>
             <a:endParaRPr lang="en-US" sz="1250" dirty="0"/>
           </a:p>
@@ -13897,7 +13897,7 @@
                 <a:ea typeface="Cambria" pitchFamily="34" charset="-122"/>
                 <a:cs typeface="Cambria" pitchFamily="34" charset="-120"/>
               </a:rPr>
-              <a:t>One-way constraints break PIBT's progress argument</a:t>
+              <a:t>The maximum green, and why it now matters less</a:t>
             </a:r>
             <a:endParaRPr lang="en-US" sz="1700" dirty="0"/>
           </a:p>
@@ -13939,7 +13939,7 @@
                 <a:ea typeface="Calibri" pitchFamily="34" charset="-122"/>
                 <a:cs typeface="Calibri" pitchFamily="34" charset="-120"/>
               </a:rPr>
-              <a:t>Inheritance works because you can always push a robot into an adjacent cell. Remove that freedom and the chains dead-end. This is exactly why aisle_managed_pibt collapses while full_lda_pibt survives: the recovery layer's direction override is doing the work.</a:t>
+              <a:t>It was decisive while direction was a hard constraint: without it corridors reached an absorbing deadlock. Once counterflow is merely expensive, a robot can buy its way out of a starved aisle, so the two fixes are partly redundant. It stays because it makes the aisle layer correct, not merely survivable.</a:t>
             </a:r>
             <a:endParaRPr lang="en-US" sz="1250" dirty="0"/>
           </a:p>
@@ -14008,7 +14008,7 @@
                 <a:ea typeface="Calibri" pitchFamily="34" charset="-122"/>
                 <a:cs typeface="Calibri" pitchFamily="34" charset="-120"/>
               </a:rPr>
-              <a:t>All three were predicted by the specification's own limitations section. Reporting them is more useful than tuning them away.</a:t>
+              <a:t>Coordinated direction assignment across parallel aisles — the fix the last review called most promising — is implemented, and its measured effect is ±0.011. The collapse was a liveness failure, not a connectivity one.</a:t>
             </a:r>
             <a:endParaRPr lang="en-US" sz="1250" dirty="0"/>
           </a:p>
@@ -14253,7 +14253,7 @@
                 <a:ea typeface="Cambria" pitchFamily="34" charset="-122"/>
                 <a:cs typeface="Cambria" pitchFamily="34" charset="-120"/>
               </a:rPr>
-              <a:t>Coordinate direction across parallel aisles</a:t>
+              <a:t>Make entry admission earn its cost</a:t>
             </a:r>
             <a:endParaRPr lang="en-US" sz="1700" dirty="0"/>
           </a:p>
@@ -14295,7 +14295,7 @@
                 <a:ea typeface="Calibri" pitchFamily="34" charset="-122"/>
                 <a:cs typeface="Calibri" pitchFamily="34" charset="-120"/>
               </a:rPr>
-              <a:t>Assign directions as a set, not one aisle at a time, so opposing traffic always keeps a return path. The single most promising fix.</a:t>
+              <a:t>It is the one repaired mechanism that still loses throughput on every map. The capacity model and the admission rule are both suspect; the mechanism is measurable now, so this is finally a tractable question.</a:t>
             </a:r>
             <a:endParaRPr lang="en-US" sz="1200" dirty="0"/>
           </a:p>
@@ -14430,7 +14430,7 @@
                 <a:ea typeface="Cambria" pitchFamily="34" charset="-122"/>
                 <a:cs typeface="Cambria" pitchFamily="34" charset="-120"/>
               </a:rPr>
-              <a:t>A capacity model between length and throughput</a:t>
+              <a:t>Work out why the aisle layer loses on open grids</a:t>
             </a:r>
             <a:endParaRPr lang="en-US" sz="1700" dirty="0"/>
           </a:p>
@@ -14472,7 +14472,7 @@
                 <a:ea typeface="Calibri" pitchFamily="34" charset="-122"/>
                 <a:cs typeface="Calibri" pitchFamily="34" charset="-120"/>
               </a:rPr>
-              <a:t>Bound aisle occupancy by how fast the exit actually clears, not by how many cells fit.</a:t>
+              <a:t>It wins on warehouse_corridors and loses to plain lifelong PIBT on medium and narrow. Turning cost alone beats it on two maps, which suggests most of the benefit is anti-zigzag rather than directional.</a:t>
             </a:r>
             <a:endParaRPr lang="en-US" sz="1200" dirty="0"/>
           </a:p>
@@ -14895,7 +14895,7 @@
                 <a:ea typeface="Calibri" pitchFamily="34" charset="-122"/>
                 <a:cs typeface="Calibri" pitchFamily="34" charset="-120"/>
               </a:rPr>
-              <a:t>The diagnostic that found every bug in this project is now a feature: click any robot in the GUI and it lists each candidate cell, its score, and the exact rule that rejected it.</a:t>
+              <a:t>The diagnostic that found every bug in this project is now a feature: click any robot in the GUI and it lists each candidate cell, its score, which rule rejected it, and which aisle penalty it paid.</a:t>
             </a:r>
             <a:endParaRPr lang="en-US" sz="1300" dirty="0"/>
           </a:p>
@@ -15536,7 +15536,7 @@
                 <a:ea typeface="Calibri" pitchFamily="34" charset="-122"/>
                 <a:cs typeface="Calibri" pitchFamily="34" charset="-120"/>
               </a:rPr>
-              <a:t>A two-layer architecture, a de-confounded factorial ablation, and the first comparison in this repo against Token Passing and RHCR. Two hypotheses did not survive.</a:t>
+              <a:t>A two-layer architecture, six repaired mechanisms, and a hypothesis suite that scores each claim on the quantity it actually names. Three of six hold.</a:t>
             </a:r>
             <a:endParaRPr lang="en-US" sz="1250" dirty="0"/>
           </a:p>
@@ -15629,7 +15629,7 @@
                 <a:ea typeface="Calibri" pitchFamily="34" charset="-122"/>
                 <a:cs typeface="Calibri" pitchFamily="34" charset="-120"/>
               </a:rPr>
-              <a:t>direction, congestion and turning cost decide which legal move PIBT tries first — they never replace its collision checks or its backtracking.</a:t>
+              <a:t>direction, congestion and turning cost decide which legal move PIBT tries first — they never replace its collision checks or its backtracking. Making that true in the code was worth 1.9× to 3.5× throughput.</a:t>
             </a:r>
             <a:endParaRPr lang="en-US" sz="1350" dirty="0"/>
           </a:p>
@@ -15879,7 +15879,7 @@
                 <a:ea typeface="Calibri" pitchFamily="34" charset="-122"/>
                 <a:cs typeface="Calibri" pitchFamily="34" charset="-120"/>
               </a:rPr>
-              <a:t>Forty years of MAPF converged on a mechanism — priority inheritance with backtracking — that a hundred lines of recursion capture. Both published baselines gridlock on maps where it does not.</a:t>
+              <a:t>Forty years of MAPF converged on a mechanism — priority inheritance with backtracking — that a hundred lines of recursion capture. Both published baselines gridlock on maps where it does not, and plain lifelong PIBT still wins on the open grids.</a:t>
             </a:r>
             <a:endParaRPr lang="en-US" sz="1350" dirty="0"/>
           </a:p>
@@ -15977,7 +15977,7 @@
                 <a:ea typeface="Cambria" pitchFamily="34" charset="-122"/>
                 <a:cs typeface="Cambria" pitchFamily="34" charset="-120"/>
               </a:rPr>
-              <a:t>Confounded ablations produce confident wrong answers</a:t>
+              <a:t>A mechanism that cannot act is not a negative result</a:t>
             </a:r>
             <a:endParaRPr lang="en-US" sz="2100" dirty="0"/>
           </a:p>
@@ -16019,7 +16019,7 @@
                 <a:ea typeface="Calibri" pitchFamily="34" charset="-122"/>
                 <a:cs typeface="Calibri" pitchFamily="34" charset="-120"/>
               </a:rPr>
-              <a:t>Three rungs of our own ladder flipped two flags each. Isolating them cost four runs per step and overturned two published-sounding findings, including our headline mechanism.</a:t>
+              <a:t>Three of our six hypotheses were reported as failures. One had an empty treatment cell, one had a map where the treatment never fired, and one was rescuing deadlocks the architecture manufactured. Check that the treatment differs from the control before reading a verdict.</a:t>
             </a:r>
             <a:endParaRPr lang="en-US" sz="1350" dirty="0"/>
           </a:p>
@@ -16117,7 +16117,7 @@
                 <a:ea typeface="Cambria" pitchFamily="34" charset="-122"/>
                 <a:cs typeface="Cambria" pitchFamily="34" charset="-120"/>
               </a:rPr>
-              <a:t>A negative result, reported cleanly, is a result</a:t>
+              <a:t>The invariant was load-bearing, not decorative</a:t>
             </a:r>
             <a:endParaRPr lang="en-US" sz="2100" dirty="0"/>
           </a:p>
@@ -16159,7 +16159,7 @@
                 <a:ea typeface="Calibri" pitchFamily="34" charset="-122"/>
                 <a:cs typeface="Calibri" pitchFamily="34" charset="-120"/>
               </a:rPr>
-              <a:t>Aisle management does not yet beat plain lifelong PIBT on open graphs. We know precisely why, we can name the three causes, and each one names its own next experiment.</a:t>
+              <a:t>"Ranks candidates, never decides safety" appears three times in this deck. The code did the opposite, and that one line of architecture accounts for every collapse we had attributed to aisle management.</a:t>
             </a:r>
             <a:endParaRPr lang="en-US" sz="1350" dirty="0"/>
           </a:p>
@@ -16225,7 +16225,7 @@
                 <a:ea typeface="Courier New" pitchFamily="34" charset="-122"/>
                 <a:cs typeface="Courier New" pitchFamily="34" charset="-120"/>
               </a:rPr>
-              <a:t>python3 main.py   —   no install, no dependencies, 161 tests, zero collisions.</a:t>
+              <a:t>python3 main.py   —   no install, no dependencies, 179 tests, zero collisions.</a:t>
             </a:r>
             <a:endParaRPr lang="en-US" sz="1300" dirty="0"/>
           </a:p>
@@ -21304,7 +21304,7 @@
                 <a:ea typeface="Calibri" pitchFamily="34" charset="-122"/>
                 <a:cs typeface="Calibri" pitchFamily="34" charset="-120"/>
               </a:rPr>
-              <a:t>Off-graph, kinematics, aisle direction, aisle reservation, vertex conflict, swap conflict. Anything surviving is provably safe.</a:t>
+              <a:t>Off-graph, kinematics, vertex conflict, swap conflict. Nothing else: a rule that deletes a legal move breaks the progress argument below.</a:t>
             </a:r>
             <a:endParaRPr lang="en-US" sz="1250" dirty="0"/>
           </a:p>
@@ -21444,7 +21444,7 @@
                 <a:ea typeface="Calibri" pitchFamily="34" charset="-122"/>
                 <a:cs typeface="Calibri" pitchFamily="34" charset="-120"/>
               </a:rPr>
-              <a:t>Survivors are ranked by Sᵢ(v). This is the only place direction, congestion and turning cost act.</a:t>
+              <a:t>Survivors are ranked by S(v). Direction, congestion, turning cost and aisle rules all act here, and only here.</a:t>
             </a:r>
             <a:endParaRPr lang="en-US" sz="1250" dirty="0"/>
           </a:p>
@@ -22089,7 +22089,7 @@
                 <a:ea typeface="Calibri" pitchFamily="34" charset="-122"/>
                 <a:cs typeface="Calibri" pitchFamily="34" charset="-120"/>
               </a:rPr>
-              <a:t>Cost per timestep: O(|A|(Δ(G) + F + log|A|)). Measured here at 0.96 ms/step for 40 robots on warehouse_medium.</a:t>
+              <a:t>Cost per timestep: O(|A|(Δ(G) + F + log|A|)). Measured at 1.00 ms/step for 40 robots on warehouse_medium, 1.90 with the aisle layer on.</a:t>
             </a:r>
             <a:endParaRPr lang="en-US" sz="1000" dirty="0"/>
           </a:p>

--- a/docs/aisleflow-mapf-presentation.pptx
+++ b/docs/aisleflow-mapf-presentation.pptx
@@ -7529,7 +7529,7 @@
                 <a:ea typeface="Calibri" pitchFamily="34" charset="-122"/>
                 <a:cs typeface="Calibri" pitchFamily="34" charset="-120"/>
               </a:rPr>
-              <a:t>Reward for moving the way the robot prefers. Its proximity decay turns out to be inert — β only breaks ties among candidates with equal progress, and the decay lowers it exactly where progress already decides.</a:t>
+              <a:t>Reward for moving the way the robot prefers. Its proximity decay is inert: β only breaks ties among equal-progress moves.</a:t>
             </a:r>
             <a:endParaRPr lang="en-US" sz="1150" dirty="0"/>
           </a:p>
@@ -7823,7 +7823,7 @@
                 <a:ea typeface="Calibri" pitchFamily="34" charset="-122"/>
                 <a:cs typeface="Calibri" pitchFamily="34" charset="-120"/>
               </a:rPr>
-              <a:t>A flat penalty per direction change. The cheapest term here, and the best single mechanism in the system: turning_cost_only is the top variant on warehouse_corridors.</a:t>
+              <a:t>A flat penalty per direction change. The cheapest term here, and the strongest single mechanism in the system.</a:t>
             </a:r>
             <a:endParaRPr lang="en-US" sz="1150" dirty="0"/>
           </a:p>
@@ -7970,7 +7970,7 @@
                 <a:ea typeface="Calibri" pitchFamily="34" charset="-122"/>
                 <a:cs typeface="Calibri" pitchFamily="34" charset="-120"/>
               </a:rPr>
-              <a:t>Local density, aisle occupancy and downstream lookahead, mixed into one term — now all three normalised to [0,1], so μ·C cannot outrank a step of progress.</a:t>
+              <a:t>Local density, aisle occupancy and downstream lookahead, all normalised to [0,1].</a:t>
             </a:r>
             <a:endParaRPr lang="en-US" sz="1150" dirty="0"/>
           </a:p>
@@ -8156,7 +8156,7 @@
                 <a:ea typeface="Calibri" pitchFamily="34" charset="-122"/>
                 <a:cs typeface="Calibri" pitchFamily="34" charset="-120"/>
               </a:rPr>
-              <a:t>The seventh term, ζ = 8.0, is where the aisle layer acts: the price of driving against a committed direction. Intended ordering α &gt; ζ &gt; β &gt; γ &gt; λ  (10 &gt; 8 &gt; 3 &gt; 2 &gt; 0.5). Two things had to change for that to hold at runtime — the aisle rules became penalties instead of rejections, and the congestion mixture was normalised, having been a robot count that reached μ·C = 9.6 against α·Δ = 10.</a:t>
+              <a:t>The seventh term, ζ = 8.0, is where the aisle layer acts: the price of driving against a committed direction. Ordering α &gt; ζ &gt; β &gt; γ &gt; λ. It holds only because the aisle rules became penalties rather than rejections, and the congestion mixture was normalised.</a:t>
             </a:r>
             <a:endParaRPr lang="en-US" sz="1000" dirty="0"/>
           </a:p>
@@ -8616,7 +8616,7 @@
                 <a:ea typeface="Calibri" pitchFamily="34" charset="-122"/>
                 <a:cs typeface="Calibri" pitchFamily="34" charset="-120"/>
               </a:rPr>
-              <a:t>opposing demand exceeds τ, or T_max expires</a:t>
+              <a:t>opposing demand, or T_max expires</a:t>
             </a:r>
             <a:endParaRPr lang="en-US" sz="1150" dirty="0"/>
           </a:p>
@@ -8933,7 +8933,7 @@
                 <a:ea typeface="Calibri" pitchFamily="34" charset="-122"/>
                 <a:cs typeface="Calibri" pitchFamily="34" charset="-120"/>
               </a:rPr>
-              <a:t>Minimum green: a direction is locked for T_min steps and only flips once the imbalance leaves a dead band of ±τ, so it cannot flap.</a:t>
+              <a:t>Minimum green: locked for T_min steps, and flips only outside a ±τ dead band, so it cannot flap.</a:t>
             </a:r>
             <a:endParaRPr lang="en-US" sz="1200" dirty="0"/>
           </a:p>
@@ -8957,7 +8957,7 @@
                 <a:ea typeface="Calibri" pitchFamily="34" charset="-122"/>
                 <a:cs typeface="Calibri" pitchFamily="34" charset="-120"/>
               </a:rPr>
-              <a:t>Maximum green: past T_max, any opposing demand at all forces a drain and a flip. Without it a balanced aisle — the normal case with pickups one side and deliveries the other — starves half its traffic forever.</a:t>
+              <a:t>Maximum green: past T_max, opposing demand forces a flip. Without it a balanced aisle starves.</a:t>
             </a:r>
             <a:endParaRPr lang="en-US" sz="1200" dirty="0"/>
           </a:p>
@@ -9076,7 +9076,7 @@
                 <a:ea typeface="Calibri" pitchFamily="34" charset="-122"/>
                 <a:cs typeface="Calibri" pitchFamily="34" charset="-120"/>
               </a:rPr>
-              <a:t>A robot at an entrance gets a ticket only if occupancy plus pending tickets stay under capacity. Capacity now applies to open aisles too; the ticket only to directional ones.</a:t>
+              <a:t>A robot at an entrance gets a ticket only if occupancy plus pending tickets stay under capacity.</a:t>
             </a:r>
             <a:endParaRPr lang="en-US" sz="1200" dirty="0"/>
           </a:p>
@@ -9124,7 +9124,7 @@
                 <a:ea typeface="Calibri" pitchFamily="34" charset="-122"/>
                 <a:cs typeface="Calibri" pitchFamily="34" charset="-120"/>
               </a:rPr>
-              <a:t>Direction restricts entry, not interior movement — and it is priced, not enforced, so a robot can always buy its way out.</a:t>
+              <a:t>Direction restricts entry, not interior movement — and it is priced, not enforced.</a:t>
             </a:r>
             <a:endParaRPr lang="en-US" sz="1200" dirty="0"/>
           </a:p>
@@ -10293,7 +10293,7 @@
                 <a:ea typeface="Calibri" pitchFamily="34" charset="-122"/>
                 <a:cs typeface="Calibri" pitchFamily="34" charset="-120"/>
               </a:rPr>
-              <a:t>No progress is only a precondition. A group escalates only when a cycle in the wait-for graph or a repeated joint configuration corroborates it — worth 0.134 against 0.022 tasks/step on warehouse_corridors.</a:t>
+              <a:t>No progress is only a precondition: a group escalates only when a wait-for cycle or a repeated configuration corroborates it. Worth 0.022 → 0.134 on corridors.</a:t>
             </a:r>
             <a:endParaRPr lang="en-US" sz="1150" dirty="0"/>
           </a:p>
@@ -10577,7 +10577,7 @@
                 <a:ea typeface="Calibri" pitchFamily="34" charset="-122"/>
                 <a:cs typeface="Calibri" pitchFamily="34" charset="-120"/>
               </a:rPr>
-              <a:t>Aisle direction and reservations were applied as hard rejections, deleting legal moves before scoring — while slide 2 says the high level never replaces PIBT's backtracking. Inheritance works because a robot can always be pushed aside. Pricing direction instead: 1.9× to 3.5× throughput, significant on all four maps.</a:t>
+              <a:t>Aisle direction and reservations were hard rejections, deleting legal moves before scoring — while slide 2 says the high level never replaces PIBT's backtracking. Inheritance needs to be able to push a robot aside. Pricing instead: 1.9× to 3.5×.</a:t>
             </a:r>
             <a:endParaRPr lang="en-US" sz="1200" dirty="0"/>
           </a:p>
@@ -10751,7 +10751,7 @@
                 <a:ea typeface="Calibri" pitchFamily="34" charset="-122"/>
                 <a:cs typeface="Calibri" pitchFamily="34" charset="-120"/>
               </a:rPr>
-              <a:t>reservations was a no-op unless direction_control was “aisle”, and the variant built to isolate it sets “robot” — so H3's treatment cell was a bit-identical copy of its control. On warehouse_bottleneck no aisle ever commits a direction at all, so H1's headline map produced no treatment either.</a:t>
+              <a:t>reservations was a no-op unless direction_control was “aisle”, and the variant built to isolate it sets “robot” — so H3's treatment cell was a copy of its control. On bottleneck no aisle ever commits a direction at all.</a:t>
             </a:r>
             <a:endParaRPr lang="en-US" sz="1200" dirty="0"/>
           </a:p>
@@ -10925,7 +10925,7 @@
                 <a:ea typeface="Calibri" pitchFamily="34" charset="-122"/>
                 <a:cs typeface="Calibri" pitchFamily="34" charset="-120"/>
               </a:rPr>
-              <a:t>A committed direction was held indefinitely unless the imbalance crossed τ — and a warehouse with pickups one side and deliveries the other produces balanced demand by construction. Corridors reached an absorbing deadlock: 35 of 35 robots stalled by t=120, identical state at t=199.</a:t>
+              <a:t>A committed direction was held indefinitely unless the imbalance crossed τ, and pickups one side with deliveries the other makes demand balanced. Corridors deadlocked: 35 of 35 stalled by t=120.</a:t>
             </a:r>
             <a:endParaRPr lang="en-US" sz="1200" dirty="0"/>
           </a:p>
@@ -11099,7 +11099,7 @@
                 <a:ea typeface="Calibri" pitchFamily="34" charset="-122"/>
                 <a:cs typeface="Calibri" pitchFamily="34" charset="-120"/>
               </a:rPr>
-              <a:t>Aisles were L and U shapes, so a one-way rule blocked corners both ways; recovery fired on healthy traffic; and the congestion term was a robot count mixed with two ratios, so it outranked the terms it modulates. 179 tests, up from 161.</a:t>
+              <a:t>Aisles were L and U shapes, so one-waying blocked corners both ways; recovery fired on healthy traffic; and the congestion term outranked the terms it modulates. 179 tests, up from 161.</a:t>
             </a:r>
             <a:endParaRPr lang="en-US" sz="1200" dirty="0"/>
           </a:p>
@@ -12020,7 +12020,7 @@
                 <a:ea typeface="Calibri" pitchFamily="34" charset="-122"/>
                 <a:cs typeface="Calibri" pitchFamily="34" charset="-120"/>
               </a:rPr>
-              <a:t>With both cells live: on warehouse_medium aisle direction alone raises throughput 0.337 to 0.405, entry admission alone drops it to 0.262, and both together land at 0.217. We had blamed the flag that helps and exonerated the one that costs.</a:t>
+              <a:t>With both cells live, on warehouse_medium: aisle direction alone raises throughput 0.337 → 0.405, entry admission alone drops it to 0.262, both land at 0.217.</a:t>
             </a:r>
             <a:endParaRPr lang="en-US" sz="1150" dirty="0"/>
           </a:p>
@@ -12128,7 +12128,7 @@
                 <a:ea typeface="Calibri" pitchFamily="34" charset="-122"/>
                 <a:cs typeface="Calibri" pitchFamily="34" charset="-120"/>
               </a:rPr>
-              <a:t>congestion_aware moved the movement score, the assignment cost and the blocking term together — the same confound the factorials exist to remove, one level down. Split, neither half helps alone.</a:t>
+              <a:t>congestion_aware moved the movement score, the assignment cost and the blocking term together — the same confound the factorials remove, one level down.</a:t>
             </a:r>
             <a:endParaRPr lang="en-US" sz="1150" dirty="0"/>
           </a:p>
@@ -13307,7 +13307,7 @@
                 <a:ea typeface="Calibri" pitchFamily="34" charset="-122"/>
                 <a:cs typeface="Calibri" pitchFamily="34" charset="-120"/>
               </a:rPr>
-              <a:t>Scored on the quantity each claim names — head-on conflicts for H3, per-aisle flow for H1 — not on global throughput. H1 is the interesting one: it fails on per-aisle flow and yet raises end-to-end throughput on three of four maps, because one-way aisles route each task through fewer aisle transits.</a:t>
+              <a:t>Scored on the quantity each claim names — head-on conflicts for H3, per-aisle flow for H1 — not on throughput. H1 fails its own metric yet raises end-to-end throughput on three of four maps.</a:t>
             </a:r>
             <a:endParaRPr lang="en-US" sz="1350" dirty="0"/>
           </a:p>
@@ -13939,7 +13939,7 @@
                 <a:ea typeface="Calibri" pitchFamily="34" charset="-122"/>
                 <a:cs typeface="Calibri" pitchFamily="34" charset="-120"/>
               </a:rPr>
-              <a:t>It was decisive while direction was a hard constraint: without it corridors reached an absorbing deadlock. Once counterflow is merely expensive, a robot can buy its way out of a starved aisle, so the two fixes are partly redundant. It stays because it makes the aisle layer correct, not merely survivable.</a:t>
+              <a:t>It was decisive while direction was a hard constraint: without it corridors reached an absorbing deadlock. Once counterflow is merely expensive a robot can buy its way out, so the two fixes are partly redundant. It stays because it makes the layer correct, not just survivable.</a:t>
             </a:r>
             <a:endParaRPr lang="en-US" sz="1250" dirty="0"/>
           </a:p>
@@ -14008,7 +14008,7 @@
                 <a:ea typeface="Calibri" pitchFamily="34" charset="-122"/>
                 <a:cs typeface="Calibri" pitchFamily="34" charset="-120"/>
               </a:rPr>
-              <a:t>Coordinated direction assignment across parallel aisles — the fix the last review called most promising — is implemented, and its measured effect is ±0.011. The collapse was a liveness failure, not a connectivity one.</a:t>
+              <a:t>Coordinated direction assignment across parallel aisles — the last review's most promising fix — is implemented, and measures ±0.011.</a:t>
             </a:r>
             <a:endParaRPr lang="en-US" sz="1250" dirty="0"/>
           </a:p>
@@ -14295,7 +14295,7 @@
                 <a:ea typeface="Calibri" pitchFamily="34" charset="-122"/>
                 <a:cs typeface="Calibri" pitchFamily="34" charset="-120"/>
               </a:rPr>
-              <a:t>It is the one repaired mechanism that still loses throughput on every map. The capacity model and the admission rule are both suspect; the mechanism is measurable now, so this is finally a tractable question.</a:t>
+              <a:t>The one repaired mechanism that still loses throughput on every map. Both the capacity model and the admission rule are suspect.</a:t>
             </a:r>
             <a:endParaRPr lang="en-US" sz="1200" dirty="0"/>
           </a:p>
@@ -14472,7 +14472,7 @@
                 <a:ea typeface="Calibri" pitchFamily="34" charset="-122"/>
                 <a:cs typeface="Calibri" pitchFamily="34" charset="-120"/>
               </a:rPr>
-              <a:t>It wins on warehouse_corridors and loses to plain lifelong PIBT on medium and narrow. Turning cost alone beats it on two maps, which suggests most of the benefit is anti-zigzag rather than directional.</a:t>
+              <a:t>It wins on corridors, loses on medium and narrow. Turning cost alone beats it on two maps.</a:t>
             </a:r>
             <a:endParaRPr lang="en-US" sz="1200" dirty="0"/>
           </a:p>
@@ -15629,7 +15629,7 @@
                 <a:ea typeface="Calibri" pitchFamily="34" charset="-122"/>
                 <a:cs typeface="Calibri" pitchFamily="34" charset="-120"/>
               </a:rPr>
-              <a:t>direction, congestion and turning cost decide which legal move PIBT tries first — they never replace its collision checks or its backtracking. Making that true in the code was worth 1.9× to 3.5× throughput.</a:t>
+              <a:t>direction, congestion and turning cost decide which legal move PIBT tries first — they never replace its collision checks or its backtracking. Worth 1.9× to 3.5× once true in the code.</a:t>
             </a:r>
             <a:endParaRPr lang="en-US" sz="1350" dirty="0"/>
           </a:p>
@@ -15879,7 +15879,7 @@
                 <a:ea typeface="Calibri" pitchFamily="34" charset="-122"/>
                 <a:cs typeface="Calibri" pitchFamily="34" charset="-120"/>
               </a:rPr>
-              <a:t>Forty years of MAPF converged on a mechanism — priority inheritance with backtracking — that a hundred lines of recursion capture. Both published baselines gridlock on maps where it does not, and plain lifelong PIBT still wins on the open grids.</a:t>
+              <a:t>Forty years of MAPF converged on a mechanism — priority inheritance with backtracking — that a hundred lines of recursion capture. Plain lifelong PIBT still wins on the open grids.</a:t>
             </a:r>
             <a:endParaRPr lang="en-US" sz="1350" dirty="0"/>
           </a:p>
@@ -16019,7 +16019,7 @@
                 <a:ea typeface="Calibri" pitchFamily="34" charset="-122"/>
                 <a:cs typeface="Calibri" pitchFamily="34" charset="-120"/>
               </a:rPr>
-              <a:t>Three of our six hypotheses were reported as failures. One had an empty treatment cell, one had a map where the treatment never fired, and one was rescuing deadlocks the architecture manufactured. Check that the treatment differs from the control before reading a verdict.</a:t>
+              <a:t>Three of our six hypotheses were reported as failures. One had an empty treatment cell, one a map where the treatment never fired, one was rescuing deadlocks we had manufactured.</a:t>
             </a:r>
             <a:endParaRPr lang="en-US" sz="1350" dirty="0"/>
           </a:p>
@@ -16159,7 +16159,7 @@
                 <a:ea typeface="Calibri" pitchFamily="34" charset="-122"/>
                 <a:cs typeface="Calibri" pitchFamily="34" charset="-120"/>
               </a:rPr>
-              <a:t>"Ranks candidates, never decides safety" appears three times in this deck. The code did the opposite, and that one line of architecture accounts for every collapse we had attributed to aisle management.</a:t>
+              <a:t>“Ranks candidates, never decides safety” appears three times in this deck. The code did the opposite, and that one line accounts for every collapse we blamed on aisle management.</a:t>
             </a:r>
             <a:endParaRPr lang="en-US" sz="1350" dirty="0"/>
           </a:p>

--- a/docs/aisleflow-mapf-presentation.pptx
+++ b/docs/aisleflow-mapf-presentation.pptx
@@ -10577,7 +10577,7 @@
                 <a:ea typeface="Calibri" pitchFamily="34" charset="-122"/>
                 <a:cs typeface="Calibri" pitchFamily="34" charset="-120"/>
               </a:rPr>
-              <a:t>Aisle direction and reservations were hard rejections, deleting legal moves before scoring — while slide 2 says the high level never replaces PIBT's backtracking. Inheritance needs to be able to push a robot aside. Pricing instead: 1.9× to 3.5×.</a:t>
+              <a:t>Aisle direction and reservations were hard rejections, deleting legal moves before scoring — while slide 2 says the high level never replaces PIBT's backtracking. Inheritance needs to be able to push a robot aside. Pricing instead: 1.9× to 3.1×.</a:t>
             </a:r>
             <a:endParaRPr lang="en-US" sz="1200" dirty="0"/>
           </a:p>
@@ -13591,7 +13591,7 @@
                 <a:ea typeface="Calibri" pitchFamily="34" charset="-122"/>
                 <a:cs typeface="Calibri" pitchFamily="34" charset="-120"/>
               </a:rPr>
-              <a:t>The largest effect in the repository: 0.084 → 0.158 on corridors, 0.112 → 0.304 on narrow, 0.161 → 0.405 on medium, p ≤ 0.016 throughout. A rejected move is a move priority inheritance can no longer use to unblock a chain.</a:t>
+              <a:t>The largest effect in the repository: 0.084 → 0.158 on corridors, 0.112 → 0.304 on narrow, 0.161 → 0.405 on medium, p = 0.008 on each. A rejected move is a move priority inheritance can no longer use to unblock a chain.</a:t>
             </a:r>
             <a:endParaRPr lang="en-US" sz="1250" dirty="0"/>
           </a:p>
@@ -15629,7 +15629,7 @@
                 <a:ea typeface="Calibri" pitchFamily="34" charset="-122"/>
                 <a:cs typeface="Calibri" pitchFamily="34" charset="-120"/>
               </a:rPr>
-              <a:t>direction, congestion and turning cost decide which legal move PIBT tries first — they never replace its collision checks or its backtracking. Worth 1.9× to 3.5× once true in the code.</a:t>
+              <a:t>direction, congestion and turning cost decide which legal move PIBT tries first — they never replace its collision checks or its backtracking. Worth 1.9× to 3.1× once true in the code.</a:t>
             </a:r>
             <a:endParaRPr lang="en-US" sz="1350" dirty="0"/>
           </a:p>

--- a/docs/aisleflow-mapf-presentation.pptx
+++ b/docs/aisleflow-mapf-presentation.pptx
@@ -238,13 +238,13 @@
                 <c:formatCode>General</c:formatCode>
                 <c:ptCount val="3"/>
                 <c:pt idx="0">
-                  <c:v>0.11</c:v>
+                  <c:v>0.13</c:v>
                 </c:pt>
                 <c:pt idx="1">
-                  <c:v>0.16</c:v>
+                  <c:v>0.14</c:v>
                 </c:pt>
                 <c:pt idx="2">
-                  <c:v>0.5</c:v>
+                  <c:v>0.51</c:v>
                 </c:pt>
               </c:numCache>
             </c:numRef>
@@ -321,13 +321,13 @@
                 <c:formatCode>General</c:formatCode>
                 <c:ptCount val="3"/>
                 <c:pt idx="0">
-                  <c:v>0.15</c:v>
+                  <c:v>0.14</c:v>
                 </c:pt>
                 <c:pt idx="1">
-                  <c:v>0.02</c:v>
+                  <c:v>0.13</c:v>
                 </c:pt>
                 <c:pt idx="2">
-                  <c:v>0.2</c:v>
+                  <c:v>0.26</c:v>
                 </c:pt>
               </c:numCache>
             </c:numRef>
@@ -11416,7 +11416,7 @@
                 <a:ea typeface="Calibri" pitchFamily="34" charset="-122"/>
                 <a:cs typeface="Calibri" pitchFamily="34" charset="-120"/>
               </a:rPr>
-              <a:t>Plain lifelong_pibt — the simplest configuration already in the repo — beats both external baselines on every map, p &lt; 0.001 on throughput in every cell. Token Passing completes literally zero tasks on warehouse_corridors across all ten seeds.</a:t>
+              <a:t>Plain lifelong_pibt beats both external baselines on every map, p &lt; 0.001 on throughput in every cell. Token Passing completes literally zero tasks on warehouse_corridors across all ten seeds.</a:t>
             </a:r>
             <a:endParaRPr lang="en-US" sz="1200" dirty="0"/>
           </a:p>
@@ -11590,7 +11590,7 @@
                 <a:ea typeface="Calibri" pitchFamily="34" charset="-122"/>
                 <a:cs typeface="Calibri" pitchFamily="34" charset="-120"/>
               </a:rPr>
-              <a:t>And it is 30–190× cheaper</a:t>
+              <a:t>And it is 56–356× cheaper</a:t>
             </a:r>
             <a:endParaRPr lang="en-US" sz="1200" dirty="0"/>
           </a:p>
@@ -11632,7 +11632,7 @@
                 <a:ea typeface="Calibri" pitchFamily="34" charset="-122"/>
                 <a:cs typeface="Calibri" pitchFamily="34" charset="-120"/>
               </a:rPr>
-              <a:t>warehouse_medium, ms per step:  lifelong_pibt 0.83  ·  full_lda_pibt 2.40  ·  RHCR 58.1  ·  token_passing 158.7</a:t>
+              <a:t>warehouse_medium, ms per step:  lifelong_pibt 1.01  ·  full_lda_pibt 4.06  ·  RHCR 85.4  ·  token_passing 318.4</a:t>
             </a:r>
             <a:endParaRPr lang="en-US" sz="1150" dirty="0"/>
           </a:p>
@@ -11671,7 +11671,7 @@
                 <a:ea typeface="Calibri" pitchFamily="34" charset="-122"/>
                 <a:cs typeface="Calibri" pitchFamily="34" charset="-120"/>
               </a:rPr>
-              <a:t>10 seeds × 400 timesteps; permutation test vs. lifelong_pibt. Caveats: assignment is held constant so neither baseline runs the policy its own paper pairs it with, and RHCR's window/replan period are untuned defaults at a scale far below the one it targets.</a:t>
+              <a:t>10 seeds × 400 timesteps; permutation test vs. lifelong_pibt. full_lda_pibt now wins on bottleneck (0.14 vs 0.13, p = 0.016) and ties on corridors, where it used to lose 0.02 to 0.16. Assignment is held constant, so neither baseline runs its own paper's policy, and RHCR's window is an untuned default.</a:t>
             </a:r>
             <a:endParaRPr lang="en-US" sz="1000" dirty="0"/>
           </a:p>
